--- a/dataset/guides_final/SYS/guide/IT-SYS-007_인사·근태 문의 가이드.pptx
+++ b/dataset/guides_final/SYS/guide/IT-SYS-007_인사·근태 문의 가이드.pptx
@@ -3247,7 +3247,7 @@
                 <a:ea typeface="Malgun Gothic"/>
                 <a:cs typeface="Malgun Gothic"/>
               </a:rPr>
-              <a:t>한화시스템 ICT 임직원 IT 안내 · 사내 시스템</a:t>
+              <a:t>가상 ICT 기업 임직원 IT 안내 · 사내 시스템</a:t>
             </a:r>
           </a:p>
         </p:txBody>
@@ -3479,7 +3479,7 @@
                 <a:ea typeface="Malgun Gothic"/>
                 <a:cs typeface="Malgun Gothic"/>
               </a:rPr>
-              <a:t>© HANWHA SYSTEMS ICT · IT-SYS-007 · 사내 일반</a:t>
+              <a:t>© 가상 ICT 기업 · IT-SYS-007 · 사내 일반</a:t>
             </a:r>
           </a:p>
         </p:txBody>
@@ -5477,7 +5477,7 @@
                 <a:ea typeface="Malgun Gothic"/>
                 <a:cs typeface="Malgun Gothic"/>
               </a:rPr>
-              <a:t>© HANWHA SYSTEMS ICT · IT-SYS-007 · 사내 일반</a:t>
+              <a:t>© 가상 ICT 기업 · IT-SYS-007 · 사내 일반</a:t>
             </a:r>
           </a:p>
         </p:txBody>
@@ -6369,7 +6369,7 @@
                 <a:ea typeface="Malgun Gothic"/>
                 <a:cs typeface="Malgun Gothic"/>
               </a:rPr>
-              <a:t>© HANWHA SYSTEMS ICT · IT-SYS-007 · 사내 일반</a:t>
+              <a:t>© 가상 ICT 기업 · IT-SYS-007 · 사내 일반</a:t>
             </a:r>
           </a:p>
         </p:txBody>
@@ -6932,7 +6932,7 @@
                 <a:ea typeface="Malgun Gothic"/>
                 <a:cs typeface="Malgun Gothic"/>
               </a:rPr>
-              <a:t>© HANWHA SYSTEMS ICT · IT-SYS-007 · 사내 일반</a:t>
+              <a:t>© 가상 ICT 기업 · IT-SYS-007 · 사내 일반</a:t>
             </a:r>
           </a:p>
         </p:txBody>
@@ -7495,7 +7495,7 @@
                 <a:ea typeface="Malgun Gothic"/>
                 <a:cs typeface="Malgun Gothic"/>
               </a:rPr>
-              <a:t>© HANWHA SYSTEMS ICT · IT-SYS-007 · 사내 일반</a:t>
+              <a:t>© 가상 ICT 기업 · IT-SYS-007 · 사내 일반</a:t>
             </a:r>
           </a:p>
         </p:txBody>
@@ -8106,7 +8106,7 @@
                 <a:ea typeface="Malgun Gothic"/>
                 <a:cs typeface="Malgun Gothic"/>
               </a:rPr>
-              <a:t>© HANWHA SYSTEMS ICT · IT-SYS-007 · 사내 일반</a:t>
+              <a:t>© 가상 ICT 기업 · IT-SYS-007 · 사내 일반</a:t>
             </a:r>
           </a:p>
         </p:txBody>
@@ -10427,7 +10427,7 @@
                 <a:ea typeface="Malgun Gothic"/>
                 <a:cs typeface="Malgun Gothic"/>
               </a:rPr>
-              <a:t>© HANWHA SYSTEMS ICT · IT-SYS-007 · 사내 일반</a:t>
+              <a:t>© 가상 ICT 기업 · IT-SYS-007 · 사내 일반</a:t>
             </a:r>
           </a:p>
         </p:txBody>
@@ -11509,7 +11509,7 @@
                 <a:ea typeface="Malgun Gothic"/>
                 <a:cs typeface="Malgun Gothic"/>
               </a:rPr>
-              <a:t>© HANWHA SYSTEMS ICT · IT-SYS-007 · 사내 일반</a:t>
+              <a:t>© 가상 ICT 기업 · IT-SYS-007 · 사내 일반</a:t>
             </a:r>
           </a:p>
         </p:txBody>
@@ -12072,7 +12072,7 @@
                 <a:ea typeface="Malgun Gothic"/>
                 <a:cs typeface="Malgun Gothic"/>
               </a:rPr>
-              <a:t>© HANWHA SYSTEMS ICT · IT-SYS-007 · 사내 일반</a:t>
+              <a:t>© 가상 ICT 기업 · IT-SYS-007 · 사내 일반</a:t>
             </a:r>
           </a:p>
         </p:txBody>
@@ -12799,7 +12799,7 @@
                 <a:ea typeface="Malgun Gothic"/>
                 <a:cs typeface="Malgun Gothic"/>
               </a:rPr>
-              <a:t>© HANWHA SYSTEMS ICT · IT-SYS-007 · 사내 일반</a:t>
+              <a:t>© 가상 ICT 기업 · IT-SYS-007 · 사내 일반</a:t>
             </a:r>
           </a:p>
         </p:txBody>
@@ -13362,7 +13362,7 @@
                 <a:ea typeface="Malgun Gothic"/>
                 <a:cs typeface="Malgun Gothic"/>
               </a:rPr>
-              <a:t>© HANWHA SYSTEMS ICT · IT-SYS-007 · 사내 일반</a:t>
+              <a:t>© 가상 ICT 기업 · IT-SYS-007 · 사내 일반</a:t>
             </a:r>
           </a:p>
         </p:txBody>
@@ -15167,7 +15167,7 @@
                 <a:ea typeface="Malgun Gothic"/>
                 <a:cs typeface="Malgun Gothic"/>
               </a:rPr>
-              <a:t>© HANWHA SYSTEMS ICT · IT-SYS-007 · 사내 일반</a:t>
+              <a:t>© 가상 ICT 기업 · IT-SYS-007 · 사내 일반</a:t>
             </a:r>
           </a:p>
         </p:txBody>
@@ -17535,7 +17535,7 @@
                 <a:ea typeface="Malgun Gothic"/>
                 <a:cs typeface="Malgun Gothic"/>
               </a:rPr>
-              <a:t>© HANWHA SYSTEMS ICT · IT-SYS-007 · 사내 일반</a:t>
+              <a:t>© 가상 ICT 기업 · IT-SYS-007 · 사내 일반</a:t>
             </a:r>
           </a:p>
         </p:txBody>
@@ -18382,7 +18382,7 @@
                 <a:ea typeface="Malgun Gothic"/>
                 <a:cs typeface="Malgun Gothic"/>
               </a:rPr>
-              <a:t>© HANWHA SYSTEMS ICT · IT-SYS-007 · 사내 일반</a:t>
+              <a:t>© 가상 ICT 기업 · IT-SYS-007 · 사내 일반</a:t>
             </a:r>
           </a:p>
         </p:txBody>
@@ -18968,7 +18968,7 @@
                 <a:ea typeface="Malgun Gothic"/>
                 <a:cs typeface="Malgun Gothic"/>
               </a:rPr>
-              <a:t>© HANWHA SYSTEMS ICT · IT-SYS-007 · 사내 일반</a:t>
+              <a:t>© 가상 ICT 기업 · IT-SYS-007 · 사내 일반</a:t>
             </a:r>
           </a:p>
         </p:txBody>
@@ -19696,7 +19696,7 @@
                 <a:ea typeface="Malgun Gothic"/>
                 <a:cs typeface="Malgun Gothic"/>
               </a:rPr>
-              <a:t>© HANWHA SYSTEMS ICT · IT-SYS-007 · 사내 일반</a:t>
+              <a:t>© 가상 ICT 기업 · IT-SYS-007 · 사내 일반</a:t>
             </a:r>
           </a:p>
         </p:txBody>
@@ -21876,7 +21876,7 @@
                 <a:ea typeface="Malgun Gothic"/>
                 <a:cs typeface="Malgun Gothic"/>
               </a:rPr>
-              <a:t>© HANWHA SYSTEMS ICT · IT-SYS-007 · 사내 일반</a:t>
+              <a:t>© 가상 ICT 기업 · IT-SYS-007 · 사내 일반</a:t>
             </a:r>
           </a:p>
         </p:txBody>
@@ -23074,7 +23074,7 @@
                 <a:ea typeface="Malgun Gothic"/>
                 <a:cs typeface="Malgun Gothic"/>
               </a:rPr>
-              <a:t>© HANWHA SYSTEMS ICT · IT-SYS-007 · 사내 일반</a:t>
+              <a:t>© 가상 ICT 기업 · IT-SYS-007 · 사내 일반</a:t>
             </a:r>
           </a:p>
         </p:txBody>
@@ -23322,7 +23322,7 @@
                 <a:ea typeface="Malgun Gothic"/>
                 <a:cs typeface="Malgun Gothic"/>
               </a:rPr>
-              <a:t>© HANWHA SYSTEMS ICT · IT-SYS-007 · 사내 일반</a:t>
+              <a:t>© 가상 ICT 기업 · IT-SYS-007 · 사내 일반</a:t>
             </a:r>
           </a:p>
         </p:txBody>
@@ -23855,7 +23855,7 @@
                 <a:ea typeface="Malgun Gothic"/>
                 <a:cs typeface="Malgun Gothic"/>
               </a:rPr>
-              <a:t>© HANWHA SYSTEMS ICT · IT-SYS-007 · 사내 일반</a:t>
+              <a:t>© 가상 ICT 기업 · IT-SYS-007 · 사내 일반</a:t>
             </a:r>
           </a:p>
         </p:txBody>
@@ -24103,7 +24103,7 @@
                 <a:ea typeface="Malgun Gothic"/>
                 <a:cs typeface="Malgun Gothic"/>
               </a:rPr>
-              <a:t>© HANWHA SYSTEMS ICT · IT-SYS-007 · 사내 일반</a:t>
+              <a:t>© 가상 ICT 기업 · IT-SYS-007 · 사내 일반</a:t>
             </a:r>
           </a:p>
         </p:txBody>
@@ -24668,7 +24668,7 @@
                 <a:ea typeface="Malgun Gothic"/>
                 <a:cs typeface="Malgun Gothic"/>
               </a:rPr>
-              <a:t>© HANWHA SYSTEMS ICT · IT-SYS-007 · 사내 일반</a:t>
+              <a:t>© 가상 ICT 기업 · IT-SYS-007 · 사내 일반</a:t>
             </a:r>
           </a:p>
         </p:txBody>
@@ -25944,7 +25944,7 @@
                 <a:ea typeface="Malgun Gothic"/>
                 <a:cs typeface="Malgun Gothic"/>
               </a:rPr>
-              <a:t>© HANWHA SYSTEMS ICT · IT-SYS-007 · 사내 일반</a:t>
+              <a:t>© 가상 ICT 기업 · IT-SYS-007 · 사내 일반</a:t>
             </a:r>
           </a:p>
         </p:txBody>
@@ -26192,7 +26192,7 @@
                 <a:ea typeface="Malgun Gothic"/>
                 <a:cs typeface="Malgun Gothic"/>
               </a:rPr>
-              <a:t>© HANWHA SYSTEMS ICT · IT-SYS-007 · 사내 일반</a:t>
+              <a:t>© 가상 ICT 기업 · IT-SYS-007 · 사내 일반</a:t>
             </a:r>
           </a:p>
         </p:txBody>
@@ -26704,7 +26704,7 @@
                           <a:ea typeface="Malgun Gothic"/>
                           <a:cs typeface="Malgun Gothic"/>
                         </a:rPr>
-                        <a:t>사내 IT 포털(hanwha-admin) 상단 [챗봇 문의]</a:t>
+                        <a:t>사내 IT 포털 상단 [챗봇 문의]</a:t>
                       </a:r>
                     </a:p>
                   </a:txBody>
@@ -27396,7 +27396,7 @@
                           <a:ea typeface="Malgun Gothic"/>
                           <a:cs typeface="Malgun Gothic"/>
                         </a:rPr>
-                        <a:t>it-helpdesk@hanwha-ict.example</a:t>
+                        <a:t>it-helpdesk@ict.example</a:t>
                       </a:r>
                     </a:p>
                   </a:txBody>
@@ -27695,7 +27695,7 @@
                 <a:ea typeface="Malgun Gothic"/>
                 <a:cs typeface="Malgun Gothic"/>
               </a:rPr>
-              <a:t>© HANWHA SYSTEMS ICT · IT-SYS-007 · 사내 일반</a:t>
+              <a:t>© 가상 ICT 기업 · IT-SYS-007 · 사내 일반</a:t>
             </a:r>
           </a:p>
         </p:txBody>
@@ -27943,7 +27943,7 @@
                 <a:ea typeface="Malgun Gothic"/>
                 <a:cs typeface="Malgun Gothic"/>
               </a:rPr>
-              <a:t>© HANWHA SYSTEMS ICT · IT-SYS-007 · 사내 일반</a:t>
+              <a:t>© 가상 ICT 기업 · IT-SYS-007 · 사내 일반</a:t>
             </a:r>
           </a:p>
         </p:txBody>
@@ -29377,7 +29377,7 @@
                 <a:ea typeface="Malgun Gothic"/>
                 <a:cs typeface="Malgun Gothic"/>
               </a:rPr>
-              <a:t>© HANWHA SYSTEMS ICT · IT-SYS-007 · 사내 일반</a:t>
+              <a:t>© 가상 ICT 기업 · IT-SYS-007 · 사내 일반</a:t>
             </a:r>
           </a:p>
         </p:txBody>
@@ -30354,7 +30354,7 @@
                 <a:ea typeface="Malgun Gothic"/>
                 <a:cs typeface="Malgun Gothic"/>
               </a:rPr>
-              <a:t>© HANWHA SYSTEMS ICT · IT-SYS-007 · 사내 일반</a:t>
+              <a:t>© 가상 ICT 기업 · IT-SYS-007 · 사내 일반</a:t>
             </a:r>
           </a:p>
         </p:txBody>
@@ -30602,7 +30602,7 @@
                 <a:ea typeface="Malgun Gothic"/>
                 <a:cs typeface="Malgun Gothic"/>
               </a:rPr>
-              <a:t>© HANWHA SYSTEMS ICT · IT-SYS-007 · 사내 일반</a:t>
+              <a:t>© 가상 ICT 기업 · IT-SYS-007 · 사내 일반</a:t>
             </a:r>
           </a:p>
         </p:txBody>
@@ -31370,7 +31370,7 @@
                 <a:ea typeface="Malgun Gothic"/>
                 <a:cs typeface="Malgun Gothic"/>
               </a:rPr>
-              <a:t>© HANWHA SYSTEMS ICT · IT-SYS-007 · 사내 일반</a:t>
+              <a:t>© 가상 ICT 기업 · IT-SYS-007 · 사내 일반</a:t>
             </a:r>
           </a:p>
         </p:txBody>
@@ -31618,7 +31618,7 @@
                 <a:ea typeface="Malgun Gothic"/>
                 <a:cs typeface="Malgun Gothic"/>
               </a:rPr>
-              <a:t>© HANWHA SYSTEMS ICT · IT-SYS-007 · 사내 일반</a:t>
+              <a:t>© 가상 ICT 기업 · IT-SYS-007 · 사내 일반</a:t>
             </a:r>
           </a:p>
         </p:txBody>
@@ -32277,7 +32277,7 @@
                 <a:ea typeface="Malgun Gothic"/>
                 <a:cs typeface="Malgun Gothic"/>
               </a:rPr>
-              <a:t>© HANWHA SYSTEMS ICT · IT-SYS-007 · 사내 일반</a:t>
+              <a:t>© 가상 ICT 기업 · IT-SYS-007 · 사내 일반</a:t>
             </a:r>
           </a:p>
         </p:txBody>
@@ -32525,7 +32525,7 @@
                 <a:ea typeface="Malgun Gothic"/>
                 <a:cs typeface="Malgun Gothic"/>
               </a:rPr>
-              <a:t>© HANWHA SYSTEMS ICT · IT-SYS-007 · 사내 일반</a:t>
+              <a:t>© 가상 ICT 기업 · IT-SYS-007 · 사내 일반</a:t>
             </a:r>
           </a:p>
         </p:txBody>
@@ -34762,7 +34762,7 @@
                 <a:ea typeface="Malgun Gothic"/>
                 <a:cs typeface="Malgun Gothic"/>
               </a:rPr>
-              <a:t>© HANWHA SYSTEMS ICT · IT-SYS-007 · 사내 일반</a:t>
+              <a:t>© 가상 ICT 기업 · IT-SYS-007 · 사내 일반</a:t>
             </a:r>
           </a:p>
         </p:txBody>
